--- a/docs/SOA PROJECT PPT.pptx
+++ b/docs/SOA PROJECT PPT.pptx
@@ -121,6 +121,42 @@
     </p:ext>
   </p:extLst>
 </p:presentation>
+</file>
+
+<file path=ppt/changesInfos/changesInfo1.xml><?xml version="1.0" encoding="utf-8"?>
+<pc:chgInfo xmlns:a="http://schemas.openxmlformats.org/drawingml/2006/main" xmlns:r="http://schemas.openxmlformats.org/officeDocument/2006/relationships" xmlns:ac="http://schemas.microsoft.com/office/drawing/2013/main/command" xmlns:pc="http://schemas.microsoft.com/office/powerpoint/2013/main/command">
+  <pc:docChgLst>
+    <pc:chgData name="Pranith Reddy Modalla" userId="73f7e58376f7ff97" providerId="LiveId" clId="{C12DDF46-77FD-4063-B125-4A4850AAFA1F}"/>
+    <pc:docChg chg="modSld sldOrd">
+      <pc:chgData name="Pranith Reddy Modalla" userId="73f7e58376f7ff97" providerId="LiveId" clId="{C12DDF46-77FD-4063-B125-4A4850AAFA1F}" dt="2026-08-28T04:13:19.699" v="29" actId="20577"/>
+      <pc:docMkLst>
+        <pc:docMk/>
+      </pc:docMkLst>
+      <pc:sldChg chg="modSp mod">
+        <pc:chgData name="Pranith Reddy Modalla" userId="73f7e58376f7ff97" providerId="LiveId" clId="{C12DDF46-77FD-4063-B125-4A4850AAFA1F}" dt="2026-08-28T04:13:19.699" v="29" actId="20577"/>
+        <pc:sldMkLst>
+          <pc:docMk/>
+          <pc:sldMk cId="4118855268" sldId="260"/>
+        </pc:sldMkLst>
+        <pc:graphicFrameChg chg="modGraphic">
+          <ac:chgData name="Pranith Reddy Modalla" userId="73f7e58376f7ff97" providerId="LiveId" clId="{C12DDF46-77FD-4063-B125-4A4850AAFA1F}" dt="2026-08-28T04:13:19.699" v="29" actId="20577"/>
+          <ac:graphicFrameMkLst>
+            <pc:docMk/>
+            <pc:sldMk cId="4118855268" sldId="260"/>
+            <ac:graphicFrameMk id="3" creationId="{A45D2461-0F44-F783-D99B-E7B04CFF2B4A}"/>
+          </ac:graphicFrameMkLst>
+        </pc:graphicFrameChg>
+      </pc:sldChg>
+      <pc:sldChg chg="ord">
+        <pc:chgData name="Pranith Reddy Modalla" userId="73f7e58376f7ff97" providerId="LiveId" clId="{C12DDF46-77FD-4063-B125-4A4850AAFA1F}" dt="2026-08-28T04:12:58.424" v="1"/>
+        <pc:sldMkLst>
+          <pc:docMk/>
+          <pc:sldMk cId="2247602601" sldId="262"/>
+        </pc:sldMkLst>
+      </pc:sldChg>
+    </pc:docChg>
+  </pc:docChgLst>
+</pc:chgInfo>
 </file>
 
 <file path=ppt/diagrams/colors1.xml><?xml version="1.0" encoding="utf-8"?>
@@ -15021,14 +15057,14 @@
           <p:nvPr>
             <p:extLst>
               <p:ext uri="{D42A27DB-BD31-4B8C-83A1-F6EECF244321}">
-                <p14:modId xmlns:p14="http://schemas.microsoft.com/office/powerpoint/2010/main" val="1610373143"/>
+                <p14:modId xmlns:p14="http://schemas.microsoft.com/office/powerpoint/2010/main" val="4205533264"/>
               </p:ext>
             </p:extLst>
           </p:nvPr>
         </p:nvGraphicFramePr>
         <p:xfrm>
           <a:off x="1181617" y="2380285"/>
-          <a:ext cx="10515600" cy="3566160"/>
+          <a:ext cx="10515600" cy="3017520"/>
         </p:xfrm>
         <a:graphic>
           <a:graphicData uri="http://schemas.openxmlformats.org/drawingml/2006/table">
@@ -15620,8 +15656,8 @@
                         <a:buNone/>
                       </a:pPr>
                       <a:r>
-                        <a:rPr lang="en-IN"/>
-                        <a:t>RabbitMQ, Notification &amp; Audit Services</a:t>
+                        <a:rPr lang="en-IN" dirty="0"/>
+                        <a:t>Notification &amp; Audit Services</a:t>
                       </a:r>
                     </a:p>
                   </a:txBody>
@@ -15787,7 +15823,7 @@
                       </a:pPr>
                       <a:r>
                         <a:rPr lang="en-IN"/>
-                        <a:t>React Dashboard, Prometheus &amp; ELK</a:t>
+                        <a:t>React Dashboard</a:t>
                       </a:r>
                     </a:p>
                   </a:txBody>

--- a/docs/SOA PROJECT PPT.pptx
+++ b/docs/SOA PROJECT PPT.pptx
@@ -127,19 +127,19 @@
 <pc:chgInfo xmlns:a="http://schemas.openxmlformats.org/drawingml/2006/main" xmlns:r="http://schemas.openxmlformats.org/officeDocument/2006/relationships" xmlns:ac="http://schemas.microsoft.com/office/drawing/2013/main/command" xmlns:pc="http://schemas.microsoft.com/office/powerpoint/2013/main/command">
   <pc:docChgLst>
     <pc:chgData name="Pranith Reddy Modalla" userId="73f7e58376f7ff97" providerId="LiveId" clId="{C12DDF46-77FD-4063-B125-4A4850AAFA1F}"/>
-    <pc:docChg chg="modSld sldOrd">
-      <pc:chgData name="Pranith Reddy Modalla" userId="73f7e58376f7ff97" providerId="LiveId" clId="{C12DDF46-77FD-4063-B125-4A4850AAFA1F}" dt="2026-08-28T04:13:19.699" v="29" actId="20577"/>
+    <pc:docChg chg="undo custSel modSld sldOrd">
+      <pc:chgData name="Pranith Reddy Modalla" userId="73f7e58376f7ff97" providerId="LiveId" clId="{C12DDF46-77FD-4063-B125-4A4850AAFA1F}" dt="2026-08-28T04:15:12.181" v="52" actId="20577"/>
       <pc:docMkLst>
         <pc:docMk/>
       </pc:docMkLst>
       <pc:sldChg chg="modSp mod">
-        <pc:chgData name="Pranith Reddy Modalla" userId="73f7e58376f7ff97" providerId="LiveId" clId="{C12DDF46-77FD-4063-B125-4A4850AAFA1F}" dt="2026-08-28T04:13:19.699" v="29" actId="20577"/>
+        <pc:chgData name="Pranith Reddy Modalla" userId="73f7e58376f7ff97" providerId="LiveId" clId="{C12DDF46-77FD-4063-B125-4A4850AAFA1F}" dt="2026-08-28T04:15:12.181" v="52" actId="20577"/>
         <pc:sldMkLst>
           <pc:docMk/>
           <pc:sldMk cId="4118855268" sldId="260"/>
         </pc:sldMkLst>
         <pc:graphicFrameChg chg="modGraphic">
-          <ac:chgData name="Pranith Reddy Modalla" userId="73f7e58376f7ff97" providerId="LiveId" clId="{C12DDF46-77FD-4063-B125-4A4850AAFA1F}" dt="2026-08-28T04:13:19.699" v="29" actId="20577"/>
+          <ac:chgData name="Pranith Reddy Modalla" userId="73f7e58376f7ff97" providerId="LiveId" clId="{C12DDF46-77FD-4063-B125-4A4850AAFA1F}" dt="2026-08-28T04:15:12.181" v="52" actId="20577"/>
           <ac:graphicFrameMkLst>
             <pc:docMk/>
             <pc:sldMk cId="4118855268" sldId="260"/>
@@ -148,7 +148,7 @@
         </pc:graphicFrameChg>
       </pc:sldChg>
       <pc:sldChg chg="ord">
-        <pc:chgData name="Pranith Reddy Modalla" userId="73f7e58376f7ff97" providerId="LiveId" clId="{C12DDF46-77FD-4063-B125-4A4850AAFA1F}" dt="2026-08-28T04:12:58.424" v="1"/>
+        <pc:chgData name="Pranith Reddy Modalla" userId="73f7e58376f7ff97" providerId="LiveId" clId="{C12DDF46-77FD-4063-B125-4A4850AAFA1F}" dt="2026-08-28T04:15:04.464" v="34" actId="20578"/>
         <pc:sldMkLst>
           <pc:docMk/>
           <pc:sldMk cId="2247602601" sldId="262"/>
@@ -15057,14 +15057,14 @@
           <p:nvPr>
             <p:extLst>
               <p:ext uri="{D42A27DB-BD31-4B8C-83A1-F6EECF244321}">
-                <p14:modId xmlns:p14="http://schemas.microsoft.com/office/powerpoint/2010/main" val="4205533264"/>
+                <p14:modId xmlns:p14="http://schemas.microsoft.com/office/powerpoint/2010/main" val="2776030907"/>
               </p:ext>
             </p:extLst>
           </p:nvPr>
         </p:nvGraphicFramePr>
         <p:xfrm>
           <a:off x="1181617" y="2380285"/>
-          <a:ext cx="10515600" cy="3017520"/>
+          <a:ext cx="10515600" cy="3291840"/>
         </p:xfrm>
         <a:graphic>
           <a:graphicData uri="http://schemas.openxmlformats.org/drawingml/2006/table">
@@ -15657,7 +15657,7 @@
                       </a:pPr>
                       <a:r>
                         <a:rPr lang="en-IN" dirty="0"/>
-                        <a:t>Notification &amp; Audit Services</a:t>
+                        <a:t>RabbitMQ, Notification &amp; Audit Services</a:t>
                       </a:r>
                     </a:p>
                   </a:txBody>
@@ -15825,6 +15825,7 @@
                         <a:rPr lang="en-IN"/>
                         <a:t>React Dashboard</a:t>
                       </a:r>
+                      <a:endParaRPr lang="en-IN" dirty="0"/>
                     </a:p>
                   </a:txBody>
                   <a:tcPr anchor="ctr">
